--- a/Assets/Docs/payment Receipt.pptx
+++ b/Assets/Docs/payment Receipt.pptx
@@ -254,7 +254,7 @@
           <a:p>
             <a:fld id="{4FBA4FEC-236F-4868-8F03-87BECBE3AFDA}" type="datetimeFigureOut">
               <a:rPr lang="en-US" smtClean="0"/>
-              <a:t>6/20/2025</a:t>
+              <a:t>6/21/2025</a:t>
             </a:fld>
             <a:endParaRPr lang="en-US"/>
           </a:p>
@@ -424,7 +424,7 @@
           <a:p>
             <a:fld id="{4FBA4FEC-236F-4868-8F03-87BECBE3AFDA}" type="datetimeFigureOut">
               <a:rPr lang="en-US" smtClean="0"/>
-              <a:t>6/20/2025</a:t>
+              <a:t>6/21/2025</a:t>
             </a:fld>
             <a:endParaRPr lang="en-US"/>
           </a:p>
@@ -604,7 +604,7 @@
           <a:p>
             <a:fld id="{4FBA4FEC-236F-4868-8F03-87BECBE3AFDA}" type="datetimeFigureOut">
               <a:rPr lang="en-US" smtClean="0"/>
-              <a:t>6/20/2025</a:t>
+              <a:t>6/21/2025</a:t>
             </a:fld>
             <a:endParaRPr lang="en-US"/>
           </a:p>
@@ -774,7 +774,7 @@
           <a:p>
             <a:fld id="{4FBA4FEC-236F-4868-8F03-87BECBE3AFDA}" type="datetimeFigureOut">
               <a:rPr lang="en-US" smtClean="0"/>
-              <a:t>6/20/2025</a:t>
+              <a:t>6/21/2025</a:t>
             </a:fld>
             <a:endParaRPr lang="en-US"/>
           </a:p>
@@ -1018,7 +1018,7 @@
           <a:p>
             <a:fld id="{4FBA4FEC-236F-4868-8F03-87BECBE3AFDA}" type="datetimeFigureOut">
               <a:rPr lang="en-US" smtClean="0"/>
-              <a:t>6/20/2025</a:t>
+              <a:t>6/21/2025</a:t>
             </a:fld>
             <a:endParaRPr lang="en-US"/>
           </a:p>
@@ -1250,7 +1250,7 @@
           <a:p>
             <a:fld id="{4FBA4FEC-236F-4868-8F03-87BECBE3AFDA}" type="datetimeFigureOut">
               <a:rPr lang="en-US" smtClean="0"/>
-              <a:t>6/20/2025</a:t>
+              <a:t>6/21/2025</a:t>
             </a:fld>
             <a:endParaRPr lang="en-US"/>
           </a:p>
@@ -1617,7 +1617,7 @@
           <a:p>
             <a:fld id="{4FBA4FEC-236F-4868-8F03-87BECBE3AFDA}" type="datetimeFigureOut">
               <a:rPr lang="en-US" smtClean="0"/>
-              <a:t>6/20/2025</a:t>
+              <a:t>6/21/2025</a:t>
             </a:fld>
             <a:endParaRPr lang="en-US"/>
           </a:p>
@@ -1735,7 +1735,7 @@
           <a:p>
             <a:fld id="{4FBA4FEC-236F-4868-8F03-87BECBE3AFDA}" type="datetimeFigureOut">
               <a:rPr lang="en-US" smtClean="0"/>
-              <a:t>6/20/2025</a:t>
+              <a:t>6/21/2025</a:t>
             </a:fld>
             <a:endParaRPr lang="en-US"/>
           </a:p>
@@ -1830,7 +1830,7 @@
           <a:p>
             <a:fld id="{4FBA4FEC-236F-4868-8F03-87BECBE3AFDA}" type="datetimeFigureOut">
               <a:rPr lang="en-US" smtClean="0"/>
-              <a:t>6/20/2025</a:t>
+              <a:t>6/21/2025</a:t>
             </a:fld>
             <a:endParaRPr lang="en-US"/>
           </a:p>
@@ -2107,7 +2107,7 @@
           <a:p>
             <a:fld id="{4FBA4FEC-236F-4868-8F03-87BECBE3AFDA}" type="datetimeFigureOut">
               <a:rPr lang="en-US" smtClean="0"/>
-              <a:t>6/20/2025</a:t>
+              <a:t>6/21/2025</a:t>
             </a:fld>
             <a:endParaRPr lang="en-US"/>
           </a:p>
@@ -2364,7 +2364,7 @@
           <a:p>
             <a:fld id="{4FBA4FEC-236F-4868-8F03-87BECBE3AFDA}" type="datetimeFigureOut">
               <a:rPr lang="en-US" smtClean="0"/>
-              <a:t>6/20/2025</a:t>
+              <a:t>6/21/2025</a:t>
             </a:fld>
             <a:endParaRPr lang="en-US"/>
           </a:p>
@@ -2577,7 +2577,7 @@
           <a:p>
             <a:fld id="{4FBA4FEC-236F-4868-8F03-87BECBE3AFDA}" type="datetimeFigureOut">
               <a:rPr lang="en-US" smtClean="0"/>
-              <a:t>6/20/2025</a:t>
+              <a:t>6/21/2025</a:t>
             </a:fld>
             <a:endParaRPr lang="en-US"/>
           </a:p>
@@ -3132,261 +3132,211 @@
           </a:extLst>
         </p:spPr>
       </p:pic>
-      <p:sp>
-        <p:nvSpPr>
-          <p:cNvPr id="4" name="TextBox 3">
+      <p:grpSp>
+        <p:nvGrpSpPr>
+          <p:cNvPr id="2" name="Group 1">
             <a:extLst>
               <a:ext uri="{FF2B5EF4-FFF2-40B4-BE49-F238E27FC236}">
-                <a16:creationId xmlns:a16="http://schemas.microsoft.com/office/drawing/2014/main" id="{C337042F-94E3-8805-750B-1E614CBA2B8D}"/>
+                <a16:creationId xmlns:a16="http://schemas.microsoft.com/office/drawing/2014/main" id="{12C32731-0715-8D04-33FF-B021EE607328}"/>
               </a:ext>
             </a:extLst>
           </p:cNvPr>
-          <p:cNvSpPr txBox="1"/>
+          <p:cNvGrpSpPr/>
           <p:nvPr/>
-        </p:nvSpPr>
-        <p:spPr>
+        </p:nvGrpSpPr>
+        <p:grpSpPr>
           <a:xfrm>
-            <a:off x="4568507" y="181295"/>
-            <a:ext cx="2009274" cy="461665"/>
+            <a:off x="219262" y="331316"/>
+            <a:ext cx="6419477" cy="791520"/>
+            <a:chOff x="158304" y="427198"/>
+            <a:chExt cx="6419477" cy="791520"/>
           </a:xfrm>
-          <a:prstGeom prst="rect">
-            <a:avLst/>
-          </a:prstGeom>
-          <a:noFill/>
-        </p:spPr>
-        <p:txBody>
-          <a:bodyPr wrap="square" rtlCol="0">
-            <a:spAutoFit/>
-          </a:bodyPr>
-          <a:lstStyle/>
-          <a:p>
-            <a:pPr algn="r"/>
-            <a:r>
-              <a:rPr lang="en-US" sz="2400" b="1" dirty="0">
-                <a:solidFill>
-                  <a:schemeClr val="bg1"/>
-                </a:solidFill>
-                <a:latin typeface="Aptos ExtraBold" panose="020B0004020202020204" pitchFamily="34" charset="0"/>
-              </a:rPr>
-              <a:t>INVOICE</a:t>
-            </a:r>
-          </a:p>
-        </p:txBody>
-      </p:sp>
-      <p:sp>
-        <p:nvSpPr>
-          <p:cNvPr id="6" name="TextBox 5">
-            <a:extLst>
-              <a:ext uri="{FF2B5EF4-FFF2-40B4-BE49-F238E27FC236}">
-                <a16:creationId xmlns:a16="http://schemas.microsoft.com/office/drawing/2014/main" id="{D01AB455-CB01-7636-A3C2-5A7A2BF1332F}"/>
-              </a:ext>
-            </a:extLst>
-          </p:cNvPr>
-          <p:cNvSpPr txBox="1"/>
-          <p:nvPr/>
-        </p:nvSpPr>
-        <p:spPr>
-          <a:xfrm>
-            <a:off x="5242275" y="716532"/>
-            <a:ext cx="1335506" cy="215444"/>
-          </a:xfrm>
-          <a:prstGeom prst="rect">
-            <a:avLst/>
-          </a:prstGeom>
-          <a:noFill/>
-        </p:spPr>
-        <p:txBody>
-          <a:bodyPr wrap="square" rtlCol="0" anchor="ctr">
-            <a:spAutoFit/>
-          </a:bodyPr>
-          <a:lstStyle/>
-          <a:p>
-            <a:pPr algn="r"/>
-            <a:r>
-              <a:rPr lang="en-US" sz="800" dirty="0">
-                <a:solidFill>
-                  <a:schemeClr val="bg1"/>
-                </a:solidFill>
-                <a:latin typeface="+mj-lt"/>
-                <a:cs typeface="Arial" panose="020B0604020202020204" pitchFamily="34" charset="0"/>
-              </a:rPr>
-              <a:t>ORDER NUMBER:</a:t>
-            </a:r>
-          </a:p>
-        </p:txBody>
-      </p:sp>
-      <p:sp>
-        <p:nvSpPr>
-          <p:cNvPr id="7" name="TextBox 6">
-            <a:extLst>
-              <a:ext uri="{FF2B5EF4-FFF2-40B4-BE49-F238E27FC236}">
-                <a16:creationId xmlns:a16="http://schemas.microsoft.com/office/drawing/2014/main" id="{DF58D810-DC87-56DC-B56C-224C56A3F9EF}"/>
-              </a:ext>
-            </a:extLst>
-          </p:cNvPr>
-          <p:cNvSpPr txBox="1"/>
-          <p:nvPr/>
-        </p:nvSpPr>
-        <p:spPr>
-          <a:xfrm>
-            <a:off x="5771331" y="931977"/>
-            <a:ext cx="806450" cy="276999"/>
-          </a:xfrm>
-          <a:prstGeom prst="rect">
-            <a:avLst/>
-          </a:prstGeom>
-          <a:noFill/>
-        </p:spPr>
-        <p:txBody>
-          <a:bodyPr wrap="square" rtlCol="0" anchor="ctr">
-            <a:spAutoFit/>
-          </a:bodyPr>
-          <a:lstStyle/>
-          <a:p>
-            <a:pPr algn="r"/>
-            <a:r>
-              <a:rPr lang="en-US" sz="1200" b="1" dirty="0">
-                <a:solidFill>
-                  <a:schemeClr val="bg1"/>
-                </a:solidFill>
-                <a:latin typeface="+mj-lt"/>
-                <a:cs typeface="Arial" panose="020B0604020202020204" pitchFamily="34" charset="0"/>
-              </a:rPr>
-              <a:t>#000002</a:t>
-            </a:r>
-          </a:p>
-        </p:txBody>
-      </p:sp>
-      <p:sp>
-        <p:nvSpPr>
-          <p:cNvPr id="8" name="TextBox 7">
-            <a:extLst>
-              <a:ext uri="{FF2B5EF4-FFF2-40B4-BE49-F238E27FC236}">
-                <a16:creationId xmlns:a16="http://schemas.microsoft.com/office/drawing/2014/main" id="{EE7BA6CE-3ABA-B335-117F-66D2E389C7B6}"/>
-              </a:ext>
-            </a:extLst>
-          </p:cNvPr>
-          <p:cNvSpPr txBox="1"/>
-          <p:nvPr/>
-        </p:nvSpPr>
-        <p:spPr>
-          <a:xfrm>
-            <a:off x="280218" y="181295"/>
-            <a:ext cx="1951623" cy="830997"/>
-          </a:xfrm>
-          <a:prstGeom prst="rect">
-            <a:avLst/>
-          </a:prstGeom>
-          <a:noFill/>
-        </p:spPr>
-        <p:txBody>
-          <a:bodyPr wrap="square" rtlCol="0">
-            <a:spAutoFit/>
-          </a:bodyPr>
-          <a:lstStyle/>
-          <a:p>
-            <a:pPr algn="ctr"/>
-            <a:r>
-              <a:rPr lang="en-US" sz="2400" b="1" dirty="0">
-                <a:solidFill>
-                  <a:schemeClr val="bg1"/>
-                </a:solidFill>
-                <a:latin typeface="Aptos ExtraBold" panose="020B0004020202020204" pitchFamily="34" charset="0"/>
-              </a:rPr>
-              <a:t>QUANTUM BLAZE</a:t>
-            </a:r>
-          </a:p>
-        </p:txBody>
-      </p:sp>
-      <p:sp>
-        <p:nvSpPr>
-          <p:cNvPr id="9" name="TextBox 8">
-            <a:extLst>
-              <a:ext uri="{FF2B5EF4-FFF2-40B4-BE49-F238E27FC236}">
-                <a16:creationId xmlns:a16="http://schemas.microsoft.com/office/drawing/2014/main" id="{31989343-FBA4-8CEE-FB75-220EAFE872BC}"/>
-              </a:ext>
-            </a:extLst>
-          </p:cNvPr>
-          <p:cNvSpPr txBox="1"/>
-          <p:nvPr/>
-        </p:nvSpPr>
-        <p:spPr>
-          <a:xfrm>
-            <a:off x="280218" y="1016724"/>
-            <a:ext cx="1951623" cy="215444"/>
-          </a:xfrm>
-          <a:prstGeom prst="rect">
-            <a:avLst/>
-          </a:prstGeom>
-          <a:noFill/>
-        </p:spPr>
-        <p:txBody>
-          <a:bodyPr wrap="square" rtlCol="0" anchor="ctr">
-            <a:spAutoFit/>
-          </a:bodyPr>
-          <a:lstStyle/>
-          <a:p>
-            <a:pPr algn="ctr"/>
-            <a:r>
-              <a:rPr lang="en-US" sz="800" dirty="0">
-                <a:solidFill>
-                  <a:schemeClr val="bg1"/>
-                </a:solidFill>
-                <a:latin typeface="+mj-lt"/>
-                <a:cs typeface="Arial" panose="020B0604020202020204" pitchFamily="34" charset="0"/>
-              </a:rPr>
-              <a:t>SOFTWARE SOLUTION</a:t>
-            </a:r>
-          </a:p>
-        </p:txBody>
-      </p:sp>
-      <p:pic>
-        <p:nvPicPr>
-          <p:cNvPr id="11" name="Picture 10">
-            <a:extLst>
-              <a:ext uri="{FF2B5EF4-FFF2-40B4-BE49-F238E27FC236}">
-                <a16:creationId xmlns:a16="http://schemas.microsoft.com/office/drawing/2014/main" id="{2F4F8B72-CE0D-A44D-A9B9-0B4A9D42D822}"/>
-              </a:ext>
-            </a:extLst>
-          </p:cNvPr>
-          <p:cNvPicPr>
-            <a:picLocks noChangeAspect="1"/>
-          </p:cNvPicPr>
-          <p:nvPr/>
-        </p:nvPicPr>
-        <p:blipFill>
-          <a:blip r:embed="rId4">
-            <a:clrChange>
-              <a:clrFrom>
-                <a:srgbClr val="000000"/>
-              </a:clrFrom>
-              <a:clrTo>
-                <a:srgbClr val="000000">
-                  <a:alpha val="0"/>
-                </a:srgbClr>
-              </a:clrTo>
-            </a:clrChange>
-            <a:extLst>
-              <a:ext uri="{28A0092B-C50C-407E-A947-70E740481C1C}">
-                <a14:useLocalDpi xmlns:a14="http://schemas.microsoft.com/office/drawing/2010/main" val="0"/>
-              </a:ext>
-            </a:extLst>
-          </a:blip>
-          <a:srcRect l="19198" t="9045" r="19926" b="12385"/>
-          <a:stretch>
-            <a:fillRect/>
-          </a:stretch>
-        </p:blipFill>
-        <p:spPr>
-          <a:xfrm>
-            <a:off x="3025775" y="197464"/>
-            <a:ext cx="806450" cy="1040861"/>
-          </a:xfrm>
-          <a:prstGeom prst="rect">
-            <a:avLst/>
-          </a:prstGeom>
-        </p:spPr>
-      </p:pic>
+        </p:grpSpPr>
+        <p:sp>
+          <p:nvSpPr>
+            <p:cNvPr id="4" name="TextBox 3">
+              <a:extLst>
+                <a:ext uri="{FF2B5EF4-FFF2-40B4-BE49-F238E27FC236}">
+                  <a16:creationId xmlns:a16="http://schemas.microsoft.com/office/drawing/2014/main" id="{C337042F-94E3-8805-750B-1E614CBA2B8D}"/>
+                </a:ext>
+              </a:extLst>
+            </p:cNvPr>
+            <p:cNvSpPr txBox="1"/>
+            <p:nvPr/>
+          </p:nvSpPr>
+          <p:spPr>
+            <a:xfrm>
+              <a:off x="4922275" y="427198"/>
+              <a:ext cx="1655506" cy="461665"/>
+            </a:xfrm>
+            <a:prstGeom prst="rect">
+              <a:avLst/>
+            </a:prstGeom>
+            <a:noFill/>
+          </p:spPr>
+          <p:txBody>
+            <a:bodyPr wrap="square" rtlCol="0">
+              <a:spAutoFit/>
+            </a:bodyPr>
+            <a:lstStyle/>
+            <a:p>
+              <a:pPr algn="ctr"/>
+              <a:r>
+                <a:rPr lang="en-US" sz="2400" b="1" dirty="0">
+                  <a:solidFill>
+                    <a:schemeClr val="bg1"/>
+                  </a:solidFill>
+                  <a:latin typeface="Aptos ExtraBold" panose="020B0004020202020204" pitchFamily="34" charset="0"/>
+                </a:rPr>
+                <a:t>INVOICE</a:t>
+              </a:r>
+            </a:p>
+          </p:txBody>
+        </p:sp>
+        <p:sp>
+          <p:nvSpPr>
+            <p:cNvPr id="6" name="TextBox 5">
+              <a:extLst>
+                <a:ext uri="{FF2B5EF4-FFF2-40B4-BE49-F238E27FC236}">
+                  <a16:creationId xmlns:a16="http://schemas.microsoft.com/office/drawing/2014/main" id="{D01AB455-CB01-7636-A3C2-5A7A2BF1332F}"/>
+                </a:ext>
+              </a:extLst>
+            </p:cNvPr>
+            <p:cNvSpPr txBox="1"/>
+            <p:nvPr/>
+          </p:nvSpPr>
+          <p:spPr>
+            <a:xfrm>
+              <a:off x="5213638" y="880164"/>
+              <a:ext cx="1072781" cy="338554"/>
+            </a:xfrm>
+            <a:prstGeom prst="rect">
+              <a:avLst/>
+            </a:prstGeom>
+            <a:noFill/>
+            <a:ln w="12700">
+              <a:solidFill>
+                <a:schemeClr val="bg1"/>
+              </a:solidFill>
+            </a:ln>
+          </p:spPr>
+          <p:txBody>
+            <a:bodyPr wrap="square" rtlCol="0" anchor="ctr">
+              <a:spAutoFit/>
+            </a:bodyPr>
+            <a:lstStyle/>
+            <a:p>
+              <a:pPr algn="ctr"/>
+              <a:r>
+                <a:rPr lang="en-US" sz="800" dirty="0">
+                  <a:solidFill>
+                    <a:schemeClr val="bg1"/>
+                  </a:solidFill>
+                  <a:latin typeface="Aptos" panose="020B0004020202020204" pitchFamily="34" charset="0"/>
+                  <a:cs typeface="Arial" panose="020B0604020202020204" pitchFamily="34" charset="0"/>
+                </a:rPr>
+                <a:t>ORDER NUMBER</a:t>
+              </a:r>
+            </a:p>
+            <a:p>
+              <a:pPr algn="ctr"/>
+              <a:r>
+                <a:rPr lang="en-US" sz="800" dirty="0">
+                  <a:solidFill>
+                    <a:schemeClr val="bg1"/>
+                  </a:solidFill>
+                  <a:latin typeface="Aptos" panose="020B0004020202020204" pitchFamily="34" charset="0"/>
+                  <a:cs typeface="Arial" panose="020B0604020202020204" pitchFamily="34" charset="0"/>
+                </a:rPr>
+                <a:t>#000002</a:t>
+              </a:r>
+            </a:p>
+          </p:txBody>
+        </p:sp>
+        <p:sp>
+          <p:nvSpPr>
+            <p:cNvPr id="8" name="TextBox 7">
+              <a:extLst>
+                <a:ext uri="{FF2B5EF4-FFF2-40B4-BE49-F238E27FC236}">
+                  <a16:creationId xmlns:a16="http://schemas.microsoft.com/office/drawing/2014/main" id="{EE7BA6CE-3ABA-B335-117F-66D2E389C7B6}"/>
+                </a:ext>
+              </a:extLst>
+            </p:cNvPr>
+            <p:cNvSpPr txBox="1"/>
+            <p:nvPr/>
+          </p:nvSpPr>
+          <p:spPr>
+            <a:xfrm>
+              <a:off x="158304" y="427198"/>
+              <a:ext cx="2687703" cy="461665"/>
+            </a:xfrm>
+            <a:prstGeom prst="rect">
+              <a:avLst/>
+            </a:prstGeom>
+            <a:noFill/>
+          </p:spPr>
+          <p:txBody>
+            <a:bodyPr wrap="square" rtlCol="0">
+              <a:spAutoFit/>
+            </a:bodyPr>
+            <a:lstStyle/>
+            <a:p>
+              <a:pPr algn="ctr"/>
+              <a:r>
+                <a:rPr lang="en-US" sz="2400" b="1" dirty="0">
+                  <a:solidFill>
+                    <a:schemeClr val="bg1"/>
+                  </a:solidFill>
+                  <a:latin typeface="Aptos ExtraBold" panose="020B0004020202020204" pitchFamily="34" charset="0"/>
+                </a:rPr>
+                <a:t>QUANTUM BLAZE</a:t>
+              </a:r>
+            </a:p>
+          </p:txBody>
+        </p:sp>
+        <p:sp>
+          <p:nvSpPr>
+            <p:cNvPr id="9" name="TextBox 8">
+              <a:extLst>
+                <a:ext uri="{FF2B5EF4-FFF2-40B4-BE49-F238E27FC236}">
+                  <a16:creationId xmlns:a16="http://schemas.microsoft.com/office/drawing/2014/main" id="{31989343-FBA4-8CEE-FB75-220EAFE872BC}"/>
+                </a:ext>
+              </a:extLst>
+            </p:cNvPr>
+            <p:cNvSpPr txBox="1"/>
+            <p:nvPr/>
+          </p:nvSpPr>
+          <p:spPr>
+            <a:xfrm>
+              <a:off x="957433" y="888863"/>
+              <a:ext cx="1089444" cy="215444"/>
+            </a:xfrm>
+            <a:prstGeom prst="rect">
+              <a:avLst/>
+            </a:prstGeom>
+            <a:noFill/>
+          </p:spPr>
+          <p:txBody>
+            <a:bodyPr wrap="square" rtlCol="0" anchor="ctr">
+              <a:spAutoFit/>
+            </a:bodyPr>
+            <a:lstStyle/>
+            <a:p>
+              <a:pPr algn="ctr"/>
+              <a:r>
+                <a:rPr lang="en-US" sz="800" dirty="0">
+                  <a:solidFill>
+                    <a:schemeClr val="bg1"/>
+                  </a:solidFill>
+                  <a:latin typeface="+mj-lt"/>
+                  <a:cs typeface="Arial" panose="020B0604020202020204" pitchFamily="34" charset="0"/>
+                </a:rPr>
+                <a:t>SOFTWARE SOLUTION</a:t>
+              </a:r>
+            </a:p>
+          </p:txBody>
+        </p:sp>
+      </p:grpSp>
       <p:sp>
         <p:nvSpPr>
           <p:cNvPr id="12" name="TextBox 11">
@@ -3402,7 +3352,7 @@
         <p:spPr>
           <a:xfrm>
             <a:off x="280218" y="1739145"/>
-            <a:ext cx="540533" cy="246221"/>
+            <a:ext cx="561372" cy="246221"/>
           </a:xfrm>
           <a:prstGeom prst="rect">
             <a:avLst/>
@@ -3423,7 +3373,7 @@
                     <a:lumOff val="25000"/>
                   </a:schemeClr>
                 </a:solidFill>
-                <a:latin typeface="+mj-lt"/>
+                <a:latin typeface="Aptos" panose="020B0004020202020204" pitchFamily="34" charset="0"/>
               </a:rPr>
               <a:t>FROM:</a:t>
             </a:r>
@@ -3445,7 +3395,7 @@
         <p:spPr>
           <a:xfrm>
             <a:off x="280218" y="1985366"/>
-            <a:ext cx="2467342" cy="400110"/>
+            <a:ext cx="2630848" cy="400110"/>
           </a:xfrm>
           <a:prstGeom prst="rect">
             <a:avLst/>
@@ -3466,7 +3416,7 @@
                     <a:lumOff val="15000"/>
                   </a:schemeClr>
                 </a:solidFill>
-                <a:latin typeface="+mj-lt"/>
+                <a:latin typeface="Aptos" panose="020B0004020202020204" pitchFamily="34" charset="0"/>
               </a:rPr>
               <a:t>QUANTUM BLAZE Software Solution</a:t>
             </a:r>
@@ -3480,7 +3430,7 @@
                     <a:lumOff val="25000"/>
                   </a:schemeClr>
                 </a:solidFill>
-                <a:latin typeface="+mj-lt"/>
+                <a:latin typeface="Aptos" panose="020B0004020202020204" pitchFamily="34" charset="0"/>
               </a:rPr>
               <a:t>quantumblazesoftwaresolution@gmail.com</a:t>
             </a:r>
@@ -3501,8 +3451,8 @@
         </p:nvSpPr>
         <p:spPr>
           <a:xfrm>
-            <a:off x="5747104" y="1739145"/>
-            <a:ext cx="830677" cy="246221"/>
+            <a:off x="5689396" y="1739145"/>
+            <a:ext cx="888385" cy="246221"/>
           </a:xfrm>
           <a:prstGeom prst="rect">
             <a:avLst/>
@@ -3524,7 +3474,7 @@
                     <a:lumOff val="25000"/>
                   </a:schemeClr>
                 </a:solidFill>
-                <a:latin typeface="+mj-lt"/>
+                <a:latin typeface="Aptos" panose="020B0004020202020204" pitchFamily="34" charset="0"/>
               </a:rPr>
               <a:t>INVOICE TO:</a:t>
             </a:r>
@@ -3545,8 +3495,8 @@
         </p:nvSpPr>
         <p:spPr>
           <a:xfrm>
-            <a:off x="4292907" y="1985366"/>
-            <a:ext cx="2279855" cy="553998"/>
+            <a:off x="4166269" y="1985366"/>
+            <a:ext cx="2406493" cy="1015663"/>
           </a:xfrm>
           <a:prstGeom prst="rect">
             <a:avLst/>
@@ -3568,7 +3518,7 @@
                     <a:lumOff val="15000"/>
                   </a:schemeClr>
                 </a:solidFill>
-                <a:latin typeface="+mj-lt"/>
+                <a:latin typeface="Aptos" panose="020B0004020202020204" pitchFamily="34" charset="0"/>
               </a:rPr>
               <a:t>Milani Wijewardhana</a:t>
             </a:r>
@@ -3583,7 +3533,7 @@
                     <a:lumOff val="25000"/>
                   </a:schemeClr>
                 </a:solidFill>
-                <a:latin typeface="+mj-lt"/>
+                <a:latin typeface="Aptos" panose="020B0004020202020204" pitchFamily="34" charset="0"/>
               </a:rPr>
               <a:t>Ayusha Pharmacy &amp; Grocery,</a:t>
             </a:r>
@@ -3598,10 +3548,13 @@
                     <a:lumOff val="25000"/>
                   </a:schemeClr>
                 </a:solidFill>
-                <a:latin typeface="+mj-lt"/>
+                <a:latin typeface="Aptos" panose="020B0004020202020204" pitchFamily="34" charset="0"/>
               </a:rPr>
               <a:t>No, 55 /1/2, welikadamulla, Attanagalla.</a:t>
             </a:r>
+          </a:p>
+          <a:p>
+            <a:pPr algn="r"/>
             <a:endParaRPr lang="en-US" sz="1000" b="1" dirty="0">
               <a:solidFill>
                 <a:schemeClr val="tx1">
@@ -3609,8 +3562,38 @@
                   <a:lumOff val="25000"/>
                 </a:schemeClr>
               </a:solidFill>
-              <a:latin typeface="+mj-lt"/>
+              <a:latin typeface="Aptos" panose="020B0004020202020204" pitchFamily="34" charset="0"/>
             </a:endParaRPr>
+          </a:p>
+          <a:p>
+            <a:pPr algn="r"/>
+            <a:r>
+              <a:rPr lang="en-US" sz="1000" b="1" dirty="0">
+                <a:solidFill>
+                  <a:schemeClr val="tx1">
+                    <a:lumMod val="75000"/>
+                    <a:lumOff val="25000"/>
+                  </a:schemeClr>
+                </a:solidFill>
+                <a:latin typeface="Aptos" panose="020B0004020202020204" pitchFamily="34" charset="0"/>
+              </a:rPr>
+              <a:t>INVOICE DATE:</a:t>
+            </a:r>
+          </a:p>
+          <a:p>
+            <a:pPr algn="r"/>
+            <a:r>
+              <a:rPr lang="en-US" sz="1000" dirty="0">
+                <a:solidFill>
+                  <a:schemeClr val="tx1">
+                    <a:lumMod val="75000"/>
+                    <a:lumOff val="25000"/>
+                  </a:schemeClr>
+                </a:solidFill>
+                <a:latin typeface="Aptos" panose="020B0004020202020204" pitchFamily="34" charset="0"/>
+              </a:rPr>
+              <a:t>09 Jun, 2025</a:t>
+            </a:r>
           </a:p>
         </p:txBody>
       </p:sp>
@@ -3630,7 +3613,7 @@
         </p:nvCxnSpPr>
         <p:spPr>
           <a:xfrm>
-            <a:off x="280218" y="2539364"/>
+            <a:off x="280218" y="3001029"/>
             <a:ext cx="6297563" cy="0"/>
           </a:xfrm>
           <a:prstGeom prst="line">
@@ -3676,14 +3659,14 @@
           <p:nvPr>
             <p:extLst>
               <p:ext uri="{D42A27DB-BD31-4B8C-83A1-F6EECF244321}">
-                <p14:modId xmlns:p14="http://schemas.microsoft.com/office/powerpoint/2010/main" val="1460012336"/>
+                <p14:modId xmlns:p14="http://schemas.microsoft.com/office/powerpoint/2010/main" val="1247576592"/>
               </p:ext>
             </p:extLst>
           </p:nvPr>
         </p:nvGraphicFramePr>
         <p:xfrm>
-          <a:off x="272845" y="2720658"/>
-          <a:ext cx="6304934" cy="1097280"/>
+          <a:off x="272845" y="3198009"/>
+          <a:ext cx="6304934" cy="822960"/>
         </p:xfrm>
         <a:graphic>
           <a:graphicData uri="http://schemas.openxmlformats.org/drawingml/2006/table">
@@ -3740,7 +3723,9 @@
                     <a:lstStyle/>
                     <a:p>
                       <a:r>
-                        <a:rPr lang="en-US" sz="1000" dirty="0"/>
+                        <a:rPr lang="en-US" sz="1000" dirty="0">
+                          <a:latin typeface="Aptos" panose="020B0004020202020204" pitchFamily="34" charset="0"/>
+                        </a:rPr>
                         <a:t>Pro. ID</a:t>
                       </a:r>
                     </a:p>
@@ -3778,7 +3763,9 @@
                     <a:lstStyle/>
                     <a:p>
                       <a:r>
-                        <a:rPr lang="en-US" sz="1000" dirty="0"/>
+                        <a:rPr lang="en-US" sz="1000" dirty="0">
+                          <a:latin typeface="Aptos" panose="020B0004020202020204" pitchFamily="34" charset="0"/>
+                        </a:rPr>
                         <a:t>Description</a:t>
                       </a:r>
                     </a:p>
@@ -3816,7 +3803,9 @@
                     <a:lstStyle/>
                     <a:p>
                       <a:r>
-                        <a:rPr lang="en-US" sz="1000" dirty="0"/>
+                        <a:rPr lang="en-US" sz="1000" dirty="0">
+                          <a:latin typeface="Aptos" panose="020B0004020202020204" pitchFamily="34" charset="0"/>
+                        </a:rPr>
                         <a:t>Rate</a:t>
                       </a:r>
                     </a:p>
@@ -3854,7 +3843,9 @@
                     <a:lstStyle/>
                     <a:p>
                       <a:r>
-                        <a:rPr lang="en-US" sz="1000" dirty="0"/>
+                        <a:rPr lang="en-US" sz="1000" dirty="0">
+                          <a:latin typeface="Aptos" panose="020B0004020202020204" pitchFamily="34" charset="0"/>
+                        </a:rPr>
                         <a:t>QTY</a:t>
                       </a:r>
                     </a:p>
@@ -3892,7 +3883,9 @@
                     <a:lstStyle/>
                     <a:p>
                       <a:r>
-                        <a:rPr lang="en-US" sz="1000" dirty="0"/>
+                        <a:rPr lang="en-US" sz="1000" dirty="0">
+                          <a:latin typeface="Aptos" panose="020B0004020202020204" pitchFamily="34" charset="0"/>
+                        </a:rPr>
                         <a:t>Dis %</a:t>
                       </a:r>
                     </a:p>
@@ -3930,7 +3923,9 @@
                     <a:lstStyle/>
                     <a:p>
                       <a:r>
-                        <a:rPr lang="en-US" sz="1000" dirty="0"/>
+                        <a:rPr lang="en-US" sz="1000" dirty="0">
+                          <a:latin typeface="Aptos" panose="020B0004020202020204" pitchFamily="34" charset="0"/>
+                        </a:rPr>
                         <a:t>Amount</a:t>
                       </a:r>
                     </a:p>
@@ -3975,7 +3970,9 @@
                     <a:lstStyle/>
                     <a:p>
                       <a:r>
-                        <a:rPr lang="en-US" sz="1000" dirty="0"/>
+                        <a:rPr lang="en-US" sz="800" dirty="0">
+                          <a:latin typeface="Aptos" panose="020B0004020202020204" pitchFamily="34" charset="0"/>
+                        </a:rPr>
                         <a:t>QBP-000002</a:t>
                       </a:r>
                     </a:p>
@@ -4021,18 +4018,20 @@
                     <a:lstStyle/>
                     <a:p>
                       <a:r>
-                        <a:rPr lang="en-US" sz="1000" b="0" i="0" kern="1200" dirty="0">
+                        <a:rPr lang="en-US" sz="800" b="0" i="0" kern="1200" dirty="0">
                           <a:solidFill>
                             <a:schemeClr val="tx1"/>
                           </a:solidFill>
                           <a:effectLst/>
-                          <a:latin typeface="+mn-lt"/>
+                          <a:latin typeface="Aptos" panose="020B0004020202020204" pitchFamily="34" charset="0"/>
                           <a:ea typeface="+mn-ea"/>
                           <a:cs typeface="+mn-cs"/>
                         </a:rPr>
                         <a:t>Pharmacy POS System with Billing &amp; Inventory Management – A complete software solution for seamless sales transactions, stock tracking, and automated reporting to optimize pharmacy operations.</a:t>
                       </a:r>
-                      <a:endParaRPr lang="en-US" sz="1000" dirty="0"/>
+                      <a:endParaRPr lang="en-US" sz="800" dirty="0">
+                        <a:latin typeface="Aptos" panose="020B0004020202020204" pitchFamily="34" charset="0"/>
+                      </a:endParaRPr>
                     </a:p>
                   </a:txBody>
                   <a:tcPr>
@@ -4082,7 +4081,9 @@
                     <a:lstStyle/>
                     <a:p>
                       <a:r>
-                        <a:rPr lang="en-US" sz="1000" dirty="0"/>
+                        <a:rPr lang="en-US" sz="800" dirty="0">
+                          <a:latin typeface="Aptos" panose="020B0004020202020204" pitchFamily="34" charset="0"/>
+                        </a:rPr>
                         <a:t>Rs. 52,000.00</a:t>
                       </a:r>
                     </a:p>
@@ -4132,7 +4133,9 @@
                     <a:lstStyle/>
                     <a:p>
                       <a:r>
-                        <a:rPr lang="en-US" sz="1000" dirty="0"/>
+                        <a:rPr lang="en-US" sz="800" dirty="0">
+                          <a:latin typeface="Aptos" panose="020B0004020202020204" pitchFamily="34" charset="0"/>
+                        </a:rPr>
                         <a:t>1</a:t>
                       </a:r>
                     </a:p>
@@ -4182,7 +4185,9 @@
                     <a:lstStyle/>
                     <a:p>
                       <a:r>
-                        <a:rPr lang="en-US" sz="1000" dirty="0"/>
+                        <a:rPr lang="en-US" sz="800" dirty="0">
+                          <a:latin typeface="Aptos" panose="020B0004020202020204" pitchFamily="34" charset="0"/>
+                        </a:rPr>
                         <a:t>0%</a:t>
                       </a:r>
                     </a:p>
@@ -4232,7 +4237,9 @@
                     <a:lstStyle/>
                     <a:p>
                       <a:r>
-                        <a:rPr lang="en-US" sz="1000" dirty="0"/>
+                        <a:rPr lang="en-US" sz="800" dirty="0">
+                          <a:latin typeface="Aptos" panose="020B0004020202020204" pitchFamily="34" charset="0"/>
+                        </a:rPr>
                         <a:t>Rs. 52,000.00</a:t>
                       </a:r>
                     </a:p>
@@ -4300,8 +4307,8 @@
         </p:nvSpPr>
         <p:spPr>
           <a:xfrm>
-            <a:off x="280218" y="4120018"/>
-            <a:ext cx="2642070" cy="246221"/>
+            <a:off x="280218" y="4365742"/>
+            <a:ext cx="2797561" cy="246221"/>
           </a:xfrm>
           <a:prstGeom prst="rect">
             <a:avLst/>
@@ -4315,23 +4322,23 @@
           <a:lstStyle/>
           <a:p>
             <a:r>
-              <a:rPr lang="en-US" sz="1000" b="1" dirty="0">
+              <a:rPr lang="en-US" sz="1000" dirty="0">
                 <a:solidFill>
                   <a:schemeClr val="tx1">
                     <a:lumMod val="85000"/>
                     <a:lumOff val="15000"/>
                   </a:schemeClr>
                 </a:solidFill>
-                <a:latin typeface="+mj-lt"/>
+                <a:latin typeface="Aptos" panose="020B0004020202020204" pitchFamily="34" charset="0"/>
               </a:rPr>
               <a:t>This project is eligible for a 6-month Warranty! </a:t>
             </a:r>
             <a:r>
-              <a:rPr lang="en-US" sz="1000" b="1" dirty="0">
+              <a:rPr lang="en-US" sz="1000" dirty="0">
                 <a:solidFill>
                   <a:srgbClr val="FF0000"/>
                 </a:solidFill>
-                <a:latin typeface="+mj-lt"/>
+                <a:latin typeface="Aptos" panose="020B0004020202020204" pitchFamily="34" charset="0"/>
               </a:rPr>
               <a:t>*</a:t>
             </a:r>
@@ -4352,8 +4359,8 @@
         </p:nvSpPr>
         <p:spPr>
           <a:xfrm>
-            <a:off x="5582266" y="4120018"/>
-            <a:ext cx="995517" cy="246221"/>
+            <a:off x="5274596" y="4365742"/>
+            <a:ext cx="1303187" cy="246221"/>
           </a:xfrm>
           <a:prstGeom prst="rect">
             <a:avLst/>
@@ -4375,7 +4382,7 @@
                     <a:lumOff val="15000"/>
                   </a:schemeClr>
                 </a:solidFill>
-                <a:latin typeface="+mj-lt"/>
+                <a:latin typeface="Aptos" panose="020B0004020202020204" pitchFamily="34" charset="0"/>
               </a:rPr>
               <a:t>LKR: 52,000.00</a:t>
             </a:r>
@@ -4383,7 +4390,7 @@
               <a:solidFill>
                 <a:srgbClr val="FF0000"/>
               </a:solidFill>
-              <a:latin typeface="+mj-lt"/>
+              <a:latin typeface="Aptos" panose="020B0004020202020204" pitchFamily="34" charset="0"/>
             </a:endParaRPr>
           </a:p>
         </p:txBody>
@@ -4402,8 +4409,8 @@
         </p:nvSpPr>
         <p:spPr>
           <a:xfrm>
-            <a:off x="5582266" y="4371457"/>
-            <a:ext cx="995517" cy="246221"/>
+            <a:off x="5336502" y="4617181"/>
+            <a:ext cx="1241282" cy="246221"/>
           </a:xfrm>
           <a:prstGeom prst="rect">
             <a:avLst/>
@@ -4425,7 +4432,7 @@
                     <a:lumOff val="15000"/>
                   </a:schemeClr>
                 </a:solidFill>
-                <a:latin typeface="+mj-lt"/>
+                <a:latin typeface="Aptos" panose="020B0004020202020204" pitchFamily="34" charset="0"/>
               </a:rPr>
               <a:t>LKR: 18,000.00</a:t>
             </a:r>
@@ -4433,7 +4440,7 @@
               <a:solidFill>
                 <a:srgbClr val="FF0000"/>
               </a:solidFill>
-              <a:latin typeface="+mj-lt"/>
+              <a:latin typeface="Aptos" panose="020B0004020202020204" pitchFamily="34" charset="0"/>
             </a:endParaRPr>
           </a:p>
         </p:txBody>
@@ -4452,8 +4459,8 @@
         </p:nvSpPr>
         <p:spPr>
           <a:xfrm>
-            <a:off x="5582266" y="4617678"/>
-            <a:ext cx="995517" cy="246221"/>
+            <a:off x="5861712" y="4863402"/>
+            <a:ext cx="716071" cy="246221"/>
           </a:xfrm>
           <a:prstGeom prst="rect">
             <a:avLst/>
@@ -4475,7 +4482,7 @@
                     <a:lumOff val="15000"/>
                   </a:schemeClr>
                 </a:solidFill>
-                <a:latin typeface="+mj-lt"/>
+                <a:latin typeface="Aptos" panose="020B0004020202020204" pitchFamily="34" charset="0"/>
               </a:rPr>
               <a:t>0%</a:t>
             </a:r>
@@ -4483,7 +4490,7 @@
               <a:solidFill>
                 <a:srgbClr val="FF0000"/>
               </a:solidFill>
-              <a:latin typeface="+mj-lt"/>
+              <a:latin typeface="Aptos" panose="020B0004020202020204" pitchFamily="34" charset="0"/>
             </a:endParaRPr>
           </a:p>
         </p:txBody>
@@ -4502,7 +4509,7 @@
         </p:nvSpPr>
         <p:spPr>
           <a:xfrm>
-            <a:off x="4129549" y="4120018"/>
+            <a:off x="4129549" y="4365742"/>
             <a:ext cx="1282724" cy="246221"/>
           </a:xfrm>
           <a:prstGeom prst="rect">
@@ -4524,7 +4531,7 @@
                     <a:lumOff val="15000"/>
                   </a:schemeClr>
                 </a:solidFill>
-                <a:latin typeface="+mj-lt"/>
+                <a:latin typeface="Aptos" panose="020B0004020202020204" pitchFamily="34" charset="0"/>
               </a:rPr>
               <a:t>Gros Amount</a:t>
             </a:r>
@@ -4532,7 +4539,7 @@
               <a:solidFill>
                 <a:srgbClr val="FF0000"/>
               </a:solidFill>
-              <a:latin typeface="+mj-lt"/>
+              <a:latin typeface="Aptos" panose="020B0004020202020204" pitchFamily="34" charset="0"/>
             </a:endParaRPr>
           </a:p>
         </p:txBody>
@@ -4551,7 +4558,7 @@
         </p:nvSpPr>
         <p:spPr>
           <a:xfrm>
-            <a:off x="4129549" y="4371457"/>
+            <a:off x="4129549" y="4617181"/>
             <a:ext cx="1282724" cy="246221"/>
           </a:xfrm>
           <a:prstGeom prst="rect">
@@ -4573,7 +4580,7 @@
                     <a:lumOff val="15000"/>
                   </a:schemeClr>
                 </a:solidFill>
-                <a:latin typeface="+mj-lt"/>
+                <a:latin typeface="Aptos" panose="020B0004020202020204" pitchFamily="34" charset="0"/>
               </a:rPr>
               <a:t>Upfront Payment</a:t>
             </a:r>
@@ -4581,7 +4588,7 @@
               <a:solidFill>
                 <a:srgbClr val="FF0000"/>
               </a:solidFill>
-              <a:latin typeface="+mj-lt"/>
+              <a:latin typeface="Aptos" panose="020B0004020202020204" pitchFamily="34" charset="0"/>
             </a:endParaRPr>
           </a:p>
         </p:txBody>
@@ -4600,7 +4607,7 @@
         </p:nvSpPr>
         <p:spPr>
           <a:xfrm>
-            <a:off x="4129549" y="4617678"/>
+            <a:off x="4129549" y="4863402"/>
             <a:ext cx="1282724" cy="246221"/>
           </a:xfrm>
           <a:prstGeom prst="rect">
@@ -4622,7 +4629,7 @@
                     <a:lumOff val="15000"/>
                   </a:schemeClr>
                 </a:solidFill>
-                <a:latin typeface="+mj-lt"/>
+                <a:latin typeface="Aptos" panose="020B0004020202020204" pitchFamily="34" charset="0"/>
               </a:rPr>
               <a:t>Discount</a:t>
             </a:r>
@@ -4630,7 +4637,7 @@
               <a:solidFill>
                 <a:srgbClr val="FF0000"/>
               </a:solidFill>
-              <a:latin typeface="+mj-lt"/>
+              <a:latin typeface="Aptos" panose="020B0004020202020204" pitchFamily="34" charset="0"/>
             </a:endParaRPr>
           </a:p>
         </p:txBody>
@@ -4651,7 +4658,7 @@
         </p:nvCxnSpPr>
         <p:spPr>
           <a:xfrm>
-            <a:off x="4129549" y="4868448"/>
+            <a:off x="4129549" y="5114172"/>
             <a:ext cx="2443213" cy="0"/>
           </a:xfrm>
           <a:prstGeom prst="line">
@@ -4695,8 +4702,8 @@
         </p:nvSpPr>
         <p:spPr>
           <a:xfrm>
-            <a:off x="5582266" y="4914441"/>
-            <a:ext cx="995517" cy="246221"/>
+            <a:off x="5505000" y="5160165"/>
+            <a:ext cx="1072783" cy="246221"/>
           </a:xfrm>
           <a:prstGeom prst="rect">
             <a:avLst/>
@@ -4718,7 +4725,7 @@
                     <a:lumOff val="15000"/>
                   </a:schemeClr>
                 </a:solidFill>
-                <a:latin typeface="+mj-lt"/>
+                <a:latin typeface="Aptos" panose="020B0004020202020204" pitchFamily="34" charset="0"/>
               </a:rPr>
               <a:t>LKR: 34,000.00</a:t>
             </a:r>
@@ -4726,7 +4733,7 @@
               <a:solidFill>
                 <a:srgbClr val="FF0000"/>
               </a:solidFill>
-              <a:latin typeface="+mj-lt"/>
+              <a:latin typeface="Aptos" panose="020B0004020202020204" pitchFamily="34" charset="0"/>
             </a:endParaRPr>
           </a:p>
         </p:txBody>
@@ -4745,7 +4752,7 @@
         </p:nvSpPr>
         <p:spPr>
           <a:xfrm>
-            <a:off x="4129549" y="4914441"/>
+            <a:off x="4129549" y="5160165"/>
             <a:ext cx="1282724" cy="246221"/>
           </a:xfrm>
           <a:prstGeom prst="rect">
@@ -4767,7 +4774,7 @@
                     <a:lumOff val="15000"/>
                   </a:schemeClr>
                 </a:solidFill>
-                <a:latin typeface="+mj-lt"/>
+                <a:latin typeface="Aptos" panose="020B0004020202020204" pitchFamily="34" charset="0"/>
               </a:rPr>
               <a:t>Net Amount</a:t>
             </a:r>
@@ -4775,7 +4782,7 @@
               <a:solidFill>
                 <a:srgbClr val="FF0000"/>
               </a:solidFill>
-              <a:latin typeface="+mj-lt"/>
+              <a:latin typeface="Aptos" panose="020B0004020202020204" pitchFamily="34" charset="0"/>
             </a:endParaRPr>
           </a:p>
         </p:txBody>
@@ -4796,7 +4803,7 @@
         </p:nvCxnSpPr>
         <p:spPr>
           <a:xfrm>
-            <a:off x="4129549" y="5159134"/>
+            <a:off x="4129549" y="5404858"/>
             <a:ext cx="2443213" cy="0"/>
           </a:xfrm>
           <a:prstGeom prst="line">
@@ -4842,7 +4849,7 @@
         </p:nvCxnSpPr>
         <p:spPr>
           <a:xfrm>
-            <a:off x="4129549" y="5184156"/>
+            <a:off x="4129549" y="5429880"/>
             <a:ext cx="2443213" cy="0"/>
           </a:xfrm>
           <a:prstGeom prst="line">
@@ -4886,7 +4893,7 @@
         </p:nvSpPr>
         <p:spPr>
           <a:xfrm>
-            <a:off x="280218" y="6023890"/>
+            <a:off x="280218" y="6319190"/>
             <a:ext cx="1662879" cy="246221"/>
           </a:xfrm>
           <a:prstGeom prst="rect">
@@ -4909,7 +4916,7 @@
                     <a:lumOff val="15000"/>
                   </a:schemeClr>
                 </a:solidFill>
-                <a:latin typeface="+mj-lt"/>
+                <a:latin typeface="Aptos" panose="020B0004020202020204" pitchFamily="34" charset="0"/>
               </a:rPr>
               <a:t>Provider</a:t>
             </a:r>
@@ -4917,7 +4924,7 @@
               <a:solidFill>
                 <a:srgbClr val="FF0000"/>
               </a:solidFill>
-              <a:latin typeface="+mj-lt"/>
+              <a:latin typeface="Aptos" panose="020B0004020202020204" pitchFamily="34" charset="0"/>
             </a:endParaRPr>
           </a:p>
         </p:txBody>
@@ -4936,7 +4943,7 @@
         </p:nvSpPr>
         <p:spPr>
           <a:xfrm>
-            <a:off x="284770" y="5777669"/>
+            <a:off x="284770" y="6072969"/>
             <a:ext cx="1658328" cy="246221"/>
           </a:xfrm>
           <a:prstGeom prst="rect">
@@ -4959,7 +4966,7 @@
                     <a:lumOff val="15000"/>
                   </a:schemeClr>
                 </a:solidFill>
-                <a:latin typeface="+mj-lt"/>
+                <a:latin typeface="Aptos" panose="020B0004020202020204" pitchFamily="34" charset="0"/>
               </a:rPr>
               <a:t>……………………………</a:t>
             </a:r>
@@ -4967,7 +4974,7 @@
               <a:solidFill>
                 <a:srgbClr val="FF0000"/>
               </a:solidFill>
-              <a:latin typeface="+mj-lt"/>
+              <a:latin typeface="Aptos" panose="020B0004020202020204" pitchFamily="34" charset="0"/>
             </a:endParaRPr>
           </a:p>
         </p:txBody>
@@ -4986,7 +4993,7 @@
         </p:nvSpPr>
         <p:spPr>
           <a:xfrm>
-            <a:off x="4922275" y="6023890"/>
+            <a:off x="4922275" y="6319190"/>
             <a:ext cx="1662879" cy="246221"/>
           </a:xfrm>
           <a:prstGeom prst="rect">
@@ -5009,7 +5016,7 @@
                     <a:lumOff val="15000"/>
                   </a:schemeClr>
                 </a:solidFill>
-                <a:latin typeface="+mj-lt"/>
+                <a:latin typeface="Aptos" panose="020B0004020202020204" pitchFamily="34" charset="0"/>
               </a:rPr>
               <a:t>Client</a:t>
             </a:r>
@@ -5017,7 +5024,7 @@
               <a:solidFill>
                 <a:srgbClr val="FF0000"/>
               </a:solidFill>
-              <a:latin typeface="+mj-lt"/>
+              <a:latin typeface="Aptos" panose="020B0004020202020204" pitchFamily="34" charset="0"/>
             </a:endParaRPr>
           </a:p>
         </p:txBody>
@@ -5036,7 +5043,7 @@
         </p:nvSpPr>
         <p:spPr>
           <a:xfrm>
-            <a:off x="4926827" y="5777669"/>
+            <a:off x="4926827" y="6072969"/>
             <a:ext cx="1658328" cy="246221"/>
           </a:xfrm>
           <a:prstGeom prst="rect">
@@ -5059,7 +5066,7 @@
                     <a:lumOff val="15000"/>
                   </a:schemeClr>
                 </a:solidFill>
-                <a:latin typeface="+mj-lt"/>
+                <a:latin typeface="Aptos" panose="020B0004020202020204" pitchFamily="34" charset="0"/>
               </a:rPr>
               <a:t>……………………………</a:t>
             </a:r>
@@ -5067,7 +5074,7 @@
               <a:solidFill>
                 <a:srgbClr val="FF0000"/>
               </a:solidFill>
-              <a:latin typeface="+mj-lt"/>
+              <a:latin typeface="Aptos" panose="020B0004020202020204" pitchFamily="34" charset="0"/>
             </a:endParaRPr>
           </a:p>
         </p:txBody>
@@ -5086,8 +5093,8 @@
         </p:nvSpPr>
         <p:spPr>
           <a:xfrm>
-            <a:off x="2523143" y="6570416"/>
-            <a:ext cx="1811714" cy="246221"/>
+            <a:off x="2523143" y="6849554"/>
+            <a:ext cx="2036135" cy="246221"/>
           </a:xfrm>
           <a:prstGeom prst="rect">
             <a:avLst/>
@@ -5108,7 +5115,7 @@
                     <a:lumOff val="15000"/>
                   </a:schemeClr>
                 </a:solidFill>
-                <a:latin typeface="+mj-lt"/>
+                <a:latin typeface="Aptos" panose="020B0004020202020204" pitchFamily="34" charset="0"/>
               </a:rPr>
               <a:t>Terms of Service &amp; Appreciation</a:t>
             </a:r>
@@ -5116,7 +5123,7 @@
               <a:solidFill>
                 <a:srgbClr val="FF0000"/>
               </a:solidFill>
-              <a:latin typeface="+mj-lt"/>
+              <a:latin typeface="Aptos" panose="020B0004020202020204" pitchFamily="34" charset="0"/>
             </a:endParaRPr>
           </a:p>
         </p:txBody>
@@ -5135,7 +5142,7 @@
         </p:nvSpPr>
         <p:spPr>
           <a:xfrm>
-            <a:off x="817871" y="6816786"/>
+            <a:off x="817871" y="7095924"/>
             <a:ext cx="5479692" cy="1453475"/>
           </a:xfrm>
           <a:prstGeom prst="rect">
@@ -5158,7 +5165,7 @@
             </a:pPr>
             <a:r>
               <a:rPr lang="en-US" sz="1000" dirty="0">
-                <a:latin typeface="+mj-lt"/>
+                <a:latin typeface="Aptos" panose="020B0004020202020204" pitchFamily="34" charset="0"/>
               </a:rPr>
               <a:t>We stand by our products, offering repairs for any failures within the warranty period.</a:t>
             </a:r>
@@ -5173,7 +5180,7 @@
             </a:pPr>
             <a:r>
               <a:rPr lang="en-US" sz="1000" dirty="0">
-                <a:latin typeface="+mj-lt"/>
+                <a:latin typeface="Aptos" panose="020B0004020202020204" pitchFamily="34" charset="0"/>
               </a:rPr>
               <a:t>Thank you for choosing Quantum Blaze Software Solution for your software needs.</a:t>
             </a:r>
@@ -5188,19 +5195,19 @@
             </a:pPr>
             <a:r>
               <a:rPr lang="en-US" sz="1000" dirty="0">
-                <a:latin typeface="+mj-lt"/>
+                <a:latin typeface="Aptos" panose="020B0004020202020204" pitchFamily="34" charset="0"/>
               </a:rPr>
               <a:t>For inquiries, support, or additional services, please don't hesitate to contact us at </a:t>
             </a:r>
             <a:r>
               <a:rPr lang="en-US" sz="1000" u="sng" dirty="0">
-                <a:latin typeface="+mj-lt"/>
+                <a:latin typeface="Aptos" panose="020B0004020202020204" pitchFamily="34" charset="0"/>
               </a:rPr>
               <a:t>quantumblazesoftwaresolution@gmail.com</a:t>
             </a:r>
             <a:r>
               <a:rPr lang="en-US" sz="1000" dirty="0">
-                <a:latin typeface="+mj-lt"/>
+                <a:latin typeface="Aptos" panose="020B0004020202020204" pitchFamily="34" charset="0"/>
               </a:rPr>
               <a:t>.</a:t>
             </a:r>
@@ -5215,7 +5222,7 @@
             </a:pPr>
             <a:r>
               <a:rPr lang="en-US" sz="1000" dirty="0">
-                <a:latin typeface="+mj-lt"/>
+                <a:latin typeface="Aptos" panose="020B0004020202020204" pitchFamily="34" charset="0"/>
               </a:rPr>
               <a:t>We appreciate your business and look forward to continuing to serve you with excellence.</a:t>
             </a:r>
@@ -5230,7 +5237,7 @@
             </a:pPr>
             <a:r>
               <a:rPr lang="en-US" sz="1000" dirty="0">
-                <a:latin typeface="+mj-lt"/>
+                <a:latin typeface="Aptos" panose="020B0004020202020204" pitchFamily="34" charset="0"/>
               </a:rPr>
               <a:t>Pay the due payment before the deadline to ensure uninterrupted service.</a:t>
             </a:r>
@@ -5238,7 +5245,7 @@
               <a:solidFill>
                 <a:srgbClr val="FF0000"/>
               </a:solidFill>
-              <a:latin typeface="+mj-lt"/>
+              <a:latin typeface="Aptos" panose="020B0004020202020204" pitchFamily="34" charset="0"/>
             </a:endParaRPr>
           </a:p>
         </p:txBody>
@@ -5353,10 +5360,10 @@
           <p:nvPr/>
         </p:nvPicPr>
         <p:blipFill>
-          <a:blip r:embed="rId5">
+          <a:blip r:embed="rId4">
             <a:extLst>
               <a:ext uri="{96DAC541-7B7A-43D3-8B79-37D633B846F1}">
-                <asvg:svgBlip xmlns:asvg="http://schemas.microsoft.com/office/drawing/2016/SVG/main" r:embed="rId6"/>
+                <asvg:svgBlip xmlns:asvg="http://schemas.microsoft.com/office/drawing/2016/SVG/main" r:embed="rId5"/>
               </a:ext>
             </a:extLst>
           </a:blip>
@@ -5389,10 +5396,10 @@
           <p:nvPr/>
         </p:nvPicPr>
         <p:blipFill>
-          <a:blip r:embed="rId7">
+          <a:blip r:embed="rId6">
             <a:extLst>
               <a:ext uri="{96DAC541-7B7A-43D3-8B79-37D633B846F1}">
-                <asvg:svgBlip xmlns:asvg="http://schemas.microsoft.com/office/drawing/2016/SVG/main" r:embed="rId8"/>
+                <asvg:svgBlip xmlns:asvg="http://schemas.microsoft.com/office/drawing/2016/SVG/main" r:embed="rId7"/>
               </a:ext>
             </a:extLst>
           </a:blip>
@@ -5599,7 +5606,7 @@
           <p:nvPr/>
         </p:nvPicPr>
         <p:blipFill>
-          <a:blip r:embed="rId9">
+          <a:blip r:embed="rId8">
             <a:extLst>
               <a:ext uri="{28A0092B-C50C-407E-A947-70E740481C1C}">
                 <a14:useLocalDpi xmlns:a14="http://schemas.microsoft.com/office/drawing/2010/main" val="0"/>
@@ -5612,7 +5619,7 @@
         </p:blipFill>
         <p:spPr>
           <a:xfrm>
-            <a:off x="777243" y="5546064"/>
+            <a:off x="777243" y="5841364"/>
             <a:ext cx="666208" cy="354715"/>
           </a:xfrm>
           <a:prstGeom prst="rect">

--- a/Assets/Docs/payment Receipt.pptx
+++ b/Assets/Docs/payment Receipt.pptx
@@ -254,7 +254,7 @@
           <a:p>
             <a:fld id="{4FBA4FEC-236F-4868-8F03-87BECBE3AFDA}" type="datetimeFigureOut">
               <a:rPr lang="en-US" smtClean="0"/>
-              <a:t>6/21/2025</a:t>
+              <a:t>7/26/2025</a:t>
             </a:fld>
             <a:endParaRPr lang="en-US"/>
           </a:p>
@@ -424,7 +424,7 @@
           <a:p>
             <a:fld id="{4FBA4FEC-236F-4868-8F03-87BECBE3AFDA}" type="datetimeFigureOut">
               <a:rPr lang="en-US" smtClean="0"/>
-              <a:t>6/21/2025</a:t>
+              <a:t>7/26/2025</a:t>
             </a:fld>
             <a:endParaRPr lang="en-US"/>
           </a:p>
@@ -604,7 +604,7 @@
           <a:p>
             <a:fld id="{4FBA4FEC-236F-4868-8F03-87BECBE3AFDA}" type="datetimeFigureOut">
               <a:rPr lang="en-US" smtClean="0"/>
-              <a:t>6/21/2025</a:t>
+              <a:t>7/26/2025</a:t>
             </a:fld>
             <a:endParaRPr lang="en-US"/>
           </a:p>
@@ -774,7 +774,7 @@
           <a:p>
             <a:fld id="{4FBA4FEC-236F-4868-8F03-87BECBE3AFDA}" type="datetimeFigureOut">
               <a:rPr lang="en-US" smtClean="0"/>
-              <a:t>6/21/2025</a:t>
+              <a:t>7/26/2025</a:t>
             </a:fld>
             <a:endParaRPr lang="en-US"/>
           </a:p>
@@ -1018,7 +1018,7 @@
           <a:p>
             <a:fld id="{4FBA4FEC-236F-4868-8F03-87BECBE3AFDA}" type="datetimeFigureOut">
               <a:rPr lang="en-US" smtClean="0"/>
-              <a:t>6/21/2025</a:t>
+              <a:t>7/26/2025</a:t>
             </a:fld>
             <a:endParaRPr lang="en-US"/>
           </a:p>
@@ -1250,7 +1250,7 @@
           <a:p>
             <a:fld id="{4FBA4FEC-236F-4868-8F03-87BECBE3AFDA}" type="datetimeFigureOut">
               <a:rPr lang="en-US" smtClean="0"/>
-              <a:t>6/21/2025</a:t>
+              <a:t>7/26/2025</a:t>
             </a:fld>
             <a:endParaRPr lang="en-US"/>
           </a:p>
@@ -1617,7 +1617,7 @@
           <a:p>
             <a:fld id="{4FBA4FEC-236F-4868-8F03-87BECBE3AFDA}" type="datetimeFigureOut">
               <a:rPr lang="en-US" smtClean="0"/>
-              <a:t>6/21/2025</a:t>
+              <a:t>7/26/2025</a:t>
             </a:fld>
             <a:endParaRPr lang="en-US"/>
           </a:p>
@@ -1735,7 +1735,7 @@
           <a:p>
             <a:fld id="{4FBA4FEC-236F-4868-8F03-87BECBE3AFDA}" type="datetimeFigureOut">
               <a:rPr lang="en-US" smtClean="0"/>
-              <a:t>6/21/2025</a:t>
+              <a:t>7/26/2025</a:t>
             </a:fld>
             <a:endParaRPr lang="en-US"/>
           </a:p>
@@ -1830,7 +1830,7 @@
           <a:p>
             <a:fld id="{4FBA4FEC-236F-4868-8F03-87BECBE3AFDA}" type="datetimeFigureOut">
               <a:rPr lang="en-US" smtClean="0"/>
-              <a:t>6/21/2025</a:t>
+              <a:t>7/26/2025</a:t>
             </a:fld>
             <a:endParaRPr lang="en-US"/>
           </a:p>
@@ -2107,7 +2107,7 @@
           <a:p>
             <a:fld id="{4FBA4FEC-236F-4868-8F03-87BECBE3AFDA}" type="datetimeFigureOut">
               <a:rPr lang="en-US" smtClean="0"/>
-              <a:t>6/21/2025</a:t>
+              <a:t>7/26/2025</a:t>
             </a:fld>
             <a:endParaRPr lang="en-US"/>
           </a:p>
@@ -2364,7 +2364,7 @@
           <a:p>
             <a:fld id="{4FBA4FEC-236F-4868-8F03-87BECBE3AFDA}" type="datetimeFigureOut">
               <a:rPr lang="en-US" smtClean="0"/>
-              <a:t>6/21/2025</a:t>
+              <a:t>7/26/2025</a:t>
             </a:fld>
             <a:endParaRPr lang="en-US"/>
           </a:p>
@@ -2577,7 +2577,7 @@
           <a:p>
             <a:fld id="{4FBA4FEC-236F-4868-8F03-87BECBE3AFDA}" type="datetimeFigureOut">
               <a:rPr lang="en-US" smtClean="0"/>
-              <a:t>6/21/2025</a:t>
+              <a:t>7/26/2025</a:t>
             </a:fld>
             <a:endParaRPr lang="en-US"/>
           </a:p>

--- a/Assets/Docs/payment Receipt.pptx
+++ b/Assets/Docs/payment Receipt.pptx
@@ -254,7 +254,7 @@
           <a:p>
             <a:fld id="{4FBA4FEC-236F-4868-8F03-87BECBE3AFDA}" type="datetimeFigureOut">
               <a:rPr lang="en-US" smtClean="0"/>
-              <a:t>7/26/2025</a:t>
+              <a:t>8/5/2025</a:t>
             </a:fld>
             <a:endParaRPr lang="en-US"/>
           </a:p>
@@ -424,7 +424,7 @@
           <a:p>
             <a:fld id="{4FBA4FEC-236F-4868-8F03-87BECBE3AFDA}" type="datetimeFigureOut">
               <a:rPr lang="en-US" smtClean="0"/>
-              <a:t>7/26/2025</a:t>
+              <a:t>8/5/2025</a:t>
             </a:fld>
             <a:endParaRPr lang="en-US"/>
           </a:p>
@@ -604,7 +604,7 @@
           <a:p>
             <a:fld id="{4FBA4FEC-236F-4868-8F03-87BECBE3AFDA}" type="datetimeFigureOut">
               <a:rPr lang="en-US" smtClean="0"/>
-              <a:t>7/26/2025</a:t>
+              <a:t>8/5/2025</a:t>
             </a:fld>
             <a:endParaRPr lang="en-US"/>
           </a:p>
@@ -774,7 +774,7 @@
           <a:p>
             <a:fld id="{4FBA4FEC-236F-4868-8F03-87BECBE3AFDA}" type="datetimeFigureOut">
               <a:rPr lang="en-US" smtClean="0"/>
-              <a:t>7/26/2025</a:t>
+              <a:t>8/5/2025</a:t>
             </a:fld>
             <a:endParaRPr lang="en-US"/>
           </a:p>
@@ -1018,7 +1018,7 @@
           <a:p>
             <a:fld id="{4FBA4FEC-236F-4868-8F03-87BECBE3AFDA}" type="datetimeFigureOut">
               <a:rPr lang="en-US" smtClean="0"/>
-              <a:t>7/26/2025</a:t>
+              <a:t>8/5/2025</a:t>
             </a:fld>
             <a:endParaRPr lang="en-US"/>
           </a:p>
@@ -1250,7 +1250,7 @@
           <a:p>
             <a:fld id="{4FBA4FEC-236F-4868-8F03-87BECBE3AFDA}" type="datetimeFigureOut">
               <a:rPr lang="en-US" smtClean="0"/>
-              <a:t>7/26/2025</a:t>
+              <a:t>8/5/2025</a:t>
             </a:fld>
             <a:endParaRPr lang="en-US"/>
           </a:p>
@@ -1617,7 +1617,7 @@
           <a:p>
             <a:fld id="{4FBA4FEC-236F-4868-8F03-87BECBE3AFDA}" type="datetimeFigureOut">
               <a:rPr lang="en-US" smtClean="0"/>
-              <a:t>7/26/2025</a:t>
+              <a:t>8/5/2025</a:t>
             </a:fld>
             <a:endParaRPr lang="en-US"/>
           </a:p>
@@ -1735,7 +1735,7 @@
           <a:p>
             <a:fld id="{4FBA4FEC-236F-4868-8F03-87BECBE3AFDA}" type="datetimeFigureOut">
               <a:rPr lang="en-US" smtClean="0"/>
-              <a:t>7/26/2025</a:t>
+              <a:t>8/5/2025</a:t>
             </a:fld>
             <a:endParaRPr lang="en-US"/>
           </a:p>
@@ -1830,7 +1830,7 @@
           <a:p>
             <a:fld id="{4FBA4FEC-236F-4868-8F03-87BECBE3AFDA}" type="datetimeFigureOut">
               <a:rPr lang="en-US" smtClean="0"/>
-              <a:t>7/26/2025</a:t>
+              <a:t>8/5/2025</a:t>
             </a:fld>
             <a:endParaRPr lang="en-US"/>
           </a:p>
@@ -2107,7 +2107,7 @@
           <a:p>
             <a:fld id="{4FBA4FEC-236F-4868-8F03-87BECBE3AFDA}" type="datetimeFigureOut">
               <a:rPr lang="en-US" smtClean="0"/>
-              <a:t>7/26/2025</a:t>
+              <a:t>8/5/2025</a:t>
             </a:fld>
             <a:endParaRPr lang="en-US"/>
           </a:p>
@@ -2364,7 +2364,7 @@
           <a:p>
             <a:fld id="{4FBA4FEC-236F-4868-8F03-87BECBE3AFDA}" type="datetimeFigureOut">
               <a:rPr lang="en-US" smtClean="0"/>
-              <a:t>7/26/2025</a:t>
+              <a:t>8/5/2025</a:t>
             </a:fld>
             <a:endParaRPr lang="en-US"/>
           </a:p>
@@ -2577,7 +2577,7 @@
           <a:p>
             <a:fld id="{4FBA4FEC-236F-4868-8F03-87BECBE3AFDA}" type="datetimeFigureOut">
               <a:rPr lang="en-US" smtClean="0"/>
-              <a:t>7/26/2025</a:t>
+              <a:t>8/5/2025</a:t>
             </a:fld>
             <a:endParaRPr lang="en-US"/>
           </a:p>

--- a/Assets/Docs/payment Receipt.pptx
+++ b/Assets/Docs/payment Receipt.pptx
@@ -254,7 +254,7 @@
           <a:p>
             <a:fld id="{4FBA4FEC-236F-4868-8F03-87BECBE3AFDA}" type="datetimeFigureOut">
               <a:rPr lang="en-US" smtClean="0"/>
-              <a:t>8/5/2025</a:t>
+              <a:t>8/9/2025</a:t>
             </a:fld>
             <a:endParaRPr lang="en-US"/>
           </a:p>
@@ -424,7 +424,7 @@
           <a:p>
             <a:fld id="{4FBA4FEC-236F-4868-8F03-87BECBE3AFDA}" type="datetimeFigureOut">
               <a:rPr lang="en-US" smtClean="0"/>
-              <a:t>8/5/2025</a:t>
+              <a:t>8/9/2025</a:t>
             </a:fld>
             <a:endParaRPr lang="en-US"/>
           </a:p>
@@ -604,7 +604,7 @@
           <a:p>
             <a:fld id="{4FBA4FEC-236F-4868-8F03-87BECBE3AFDA}" type="datetimeFigureOut">
               <a:rPr lang="en-US" smtClean="0"/>
-              <a:t>8/5/2025</a:t>
+              <a:t>8/9/2025</a:t>
             </a:fld>
             <a:endParaRPr lang="en-US"/>
           </a:p>
@@ -774,7 +774,7 @@
           <a:p>
             <a:fld id="{4FBA4FEC-236F-4868-8F03-87BECBE3AFDA}" type="datetimeFigureOut">
               <a:rPr lang="en-US" smtClean="0"/>
-              <a:t>8/5/2025</a:t>
+              <a:t>8/9/2025</a:t>
             </a:fld>
             <a:endParaRPr lang="en-US"/>
           </a:p>
@@ -1018,7 +1018,7 @@
           <a:p>
             <a:fld id="{4FBA4FEC-236F-4868-8F03-87BECBE3AFDA}" type="datetimeFigureOut">
               <a:rPr lang="en-US" smtClean="0"/>
-              <a:t>8/5/2025</a:t>
+              <a:t>8/9/2025</a:t>
             </a:fld>
             <a:endParaRPr lang="en-US"/>
           </a:p>
@@ -1250,7 +1250,7 @@
           <a:p>
             <a:fld id="{4FBA4FEC-236F-4868-8F03-87BECBE3AFDA}" type="datetimeFigureOut">
               <a:rPr lang="en-US" smtClean="0"/>
-              <a:t>8/5/2025</a:t>
+              <a:t>8/9/2025</a:t>
             </a:fld>
             <a:endParaRPr lang="en-US"/>
           </a:p>
@@ -1617,7 +1617,7 @@
           <a:p>
             <a:fld id="{4FBA4FEC-236F-4868-8F03-87BECBE3AFDA}" type="datetimeFigureOut">
               <a:rPr lang="en-US" smtClean="0"/>
-              <a:t>8/5/2025</a:t>
+              <a:t>8/9/2025</a:t>
             </a:fld>
             <a:endParaRPr lang="en-US"/>
           </a:p>
@@ -1735,7 +1735,7 @@
           <a:p>
             <a:fld id="{4FBA4FEC-236F-4868-8F03-87BECBE3AFDA}" type="datetimeFigureOut">
               <a:rPr lang="en-US" smtClean="0"/>
-              <a:t>8/5/2025</a:t>
+              <a:t>8/9/2025</a:t>
             </a:fld>
             <a:endParaRPr lang="en-US"/>
           </a:p>
@@ -1830,7 +1830,7 @@
           <a:p>
             <a:fld id="{4FBA4FEC-236F-4868-8F03-87BECBE3AFDA}" type="datetimeFigureOut">
               <a:rPr lang="en-US" smtClean="0"/>
-              <a:t>8/5/2025</a:t>
+              <a:t>8/9/2025</a:t>
             </a:fld>
             <a:endParaRPr lang="en-US"/>
           </a:p>
@@ -2107,7 +2107,7 @@
           <a:p>
             <a:fld id="{4FBA4FEC-236F-4868-8F03-87BECBE3AFDA}" type="datetimeFigureOut">
               <a:rPr lang="en-US" smtClean="0"/>
-              <a:t>8/5/2025</a:t>
+              <a:t>8/9/2025</a:t>
             </a:fld>
             <a:endParaRPr lang="en-US"/>
           </a:p>
@@ -2364,7 +2364,7 @@
           <a:p>
             <a:fld id="{4FBA4FEC-236F-4868-8F03-87BECBE3AFDA}" type="datetimeFigureOut">
               <a:rPr lang="en-US" smtClean="0"/>
-              <a:t>8/5/2025</a:t>
+              <a:t>8/9/2025</a:t>
             </a:fld>
             <a:endParaRPr lang="en-US"/>
           </a:p>
@@ -2577,7 +2577,7 @@
           <a:p>
             <a:fld id="{4FBA4FEC-236F-4868-8F03-87BECBE3AFDA}" type="datetimeFigureOut">
               <a:rPr lang="en-US" smtClean="0"/>
-              <a:t>8/5/2025</a:t>
+              <a:t>8/9/2025</a:t>
             </a:fld>
             <a:endParaRPr lang="en-US"/>
           </a:p>
@@ -4459,7 +4459,7 @@
         </p:nvSpPr>
         <p:spPr>
           <a:xfrm>
-            <a:off x="5861712" y="4863402"/>
+            <a:off x="5861712" y="5238620"/>
             <a:ext cx="716071" cy="246221"/>
           </a:xfrm>
           <a:prstGeom prst="rect">
@@ -4607,7 +4607,7 @@
         </p:nvSpPr>
         <p:spPr>
           <a:xfrm>
-            <a:off x="4129549" y="4863402"/>
+            <a:off x="4129549" y="5238620"/>
             <a:ext cx="1282724" cy="246221"/>
           </a:xfrm>
           <a:prstGeom prst="rect">
@@ -4658,7 +4658,7 @@
         </p:nvCxnSpPr>
         <p:spPr>
           <a:xfrm>
-            <a:off x="4129549" y="5114172"/>
+            <a:off x="4129549" y="5489390"/>
             <a:ext cx="2443213" cy="0"/>
           </a:xfrm>
           <a:prstGeom prst="line">
@@ -4702,7 +4702,7 @@
         </p:nvSpPr>
         <p:spPr>
           <a:xfrm>
-            <a:off x="5505000" y="5160165"/>
+            <a:off x="5505000" y="5535383"/>
             <a:ext cx="1072783" cy="246221"/>
           </a:xfrm>
           <a:prstGeom prst="rect">
@@ -4727,7 +4727,7 @@
                 </a:solidFill>
                 <a:latin typeface="Aptos" panose="020B0004020202020204" pitchFamily="34" charset="0"/>
               </a:rPr>
-              <a:t>LKR: 34,000.00</a:t>
+              <a:t>LKR: 17,500.00</a:t>
             </a:r>
             <a:endParaRPr lang="en-US" sz="1000" b="1" dirty="0">
               <a:solidFill>
@@ -4752,7 +4752,7 @@
         </p:nvSpPr>
         <p:spPr>
           <a:xfrm>
-            <a:off x="4129549" y="5160165"/>
+            <a:off x="4129549" y="5535383"/>
             <a:ext cx="1282724" cy="246221"/>
           </a:xfrm>
           <a:prstGeom prst="rect">
@@ -4803,7 +4803,7 @@
         </p:nvCxnSpPr>
         <p:spPr>
           <a:xfrm>
-            <a:off x="4129549" y="5404858"/>
+            <a:off x="4129549" y="5780076"/>
             <a:ext cx="2443213" cy="0"/>
           </a:xfrm>
           <a:prstGeom prst="line">
@@ -4849,7 +4849,7 @@
         </p:nvCxnSpPr>
         <p:spPr>
           <a:xfrm>
-            <a:off x="4129549" y="5429880"/>
+            <a:off x="4129549" y="5805098"/>
             <a:ext cx="2443213" cy="0"/>
           </a:xfrm>
           <a:prstGeom prst="line">
@@ -5627,6 +5627,105 @@
           </a:prstGeom>
         </p:spPr>
       </p:pic>
+      <p:sp>
+        <p:nvSpPr>
+          <p:cNvPr id="3" name="TextBox 2">
+            <a:extLst>
+              <a:ext uri="{FF2B5EF4-FFF2-40B4-BE49-F238E27FC236}">
+                <a16:creationId xmlns:a16="http://schemas.microsoft.com/office/drawing/2014/main" id="{AE55EBBC-FD4B-2208-DBF2-4206B5E168D5}"/>
+              </a:ext>
+            </a:extLst>
+          </p:cNvPr>
+          <p:cNvSpPr txBox="1"/>
+          <p:nvPr/>
+        </p:nvSpPr>
+        <p:spPr>
+          <a:xfrm>
+            <a:off x="5336502" y="4872692"/>
+            <a:ext cx="1241282" cy="246221"/>
+          </a:xfrm>
+          <a:prstGeom prst="rect">
+            <a:avLst/>
+          </a:prstGeom>
+          <a:noFill/>
+        </p:spPr>
+        <p:txBody>
+          <a:bodyPr wrap="square" rtlCol="0">
+            <a:spAutoFit/>
+          </a:bodyPr>
+          <a:lstStyle/>
+          <a:p>
+            <a:pPr algn="r"/>
+            <a:r>
+              <a:rPr lang="en-US" sz="1000" dirty="0">
+                <a:solidFill>
+                  <a:schemeClr val="tx1">
+                    <a:lumMod val="85000"/>
+                    <a:lumOff val="15000"/>
+                  </a:schemeClr>
+                </a:solidFill>
+                <a:latin typeface="Aptos" panose="020B0004020202020204" pitchFamily="34" charset="0"/>
+              </a:rPr>
+              <a:t>LKR: 16,500.00</a:t>
+            </a:r>
+            <a:endParaRPr lang="en-US" sz="1000" dirty="0">
+              <a:solidFill>
+                <a:srgbClr val="FF0000"/>
+              </a:solidFill>
+              <a:latin typeface="Aptos" panose="020B0004020202020204" pitchFamily="34" charset="0"/>
+            </a:endParaRPr>
+          </a:p>
+        </p:txBody>
+      </p:sp>
+      <p:sp>
+        <p:nvSpPr>
+          <p:cNvPr id="7" name="TextBox 6">
+            <a:extLst>
+              <a:ext uri="{FF2B5EF4-FFF2-40B4-BE49-F238E27FC236}">
+                <a16:creationId xmlns:a16="http://schemas.microsoft.com/office/drawing/2014/main" id="{A8D4A9DF-85F2-E240-1191-DF7D90B4007D}"/>
+              </a:ext>
+            </a:extLst>
+          </p:cNvPr>
+          <p:cNvSpPr txBox="1"/>
+          <p:nvPr/>
+        </p:nvSpPr>
+        <p:spPr>
+          <a:xfrm>
+            <a:off x="4129549" y="4878195"/>
+            <a:ext cx="1282724" cy="246221"/>
+          </a:xfrm>
+          <a:prstGeom prst="rect">
+            <a:avLst/>
+          </a:prstGeom>
+          <a:noFill/>
+        </p:spPr>
+        <p:txBody>
+          <a:bodyPr wrap="square" rtlCol="0">
+            <a:spAutoFit/>
+          </a:bodyPr>
+          <a:lstStyle/>
+          <a:p>
+            <a:r>
+              <a:rPr lang="en-US" sz="1000" dirty="0">
+                <a:solidFill>
+                  <a:schemeClr val="tx1">
+                    <a:lumMod val="85000"/>
+                    <a:lumOff val="15000"/>
+                  </a:schemeClr>
+                </a:solidFill>
+                <a:latin typeface="Aptos" panose="020B0004020202020204" pitchFamily="34" charset="0"/>
+              </a:rPr>
+              <a:t>Partial Payment</a:t>
+            </a:r>
+            <a:endParaRPr lang="en-US" sz="1000" dirty="0">
+              <a:solidFill>
+                <a:srgbClr val="FF0000"/>
+              </a:solidFill>
+              <a:latin typeface="Aptos" panose="020B0004020202020204" pitchFamily="34" charset="0"/>
+            </a:endParaRPr>
+          </a:p>
+        </p:txBody>
+      </p:sp>
     </p:spTree>
     <p:extLst>
       <p:ext uri="{BB962C8B-B14F-4D97-AF65-F5344CB8AC3E}">
